--- a/docs/Pitch_DataQuest5_Warkab.pptx
+++ b/docs/Pitch_DataQuest5_Warkab.pptx
@@ -19368,7 +19368,7 @@
                 <a:ea typeface="Calibri" pitchFamily="34" charset="-122"/>
                 <a:cs typeface="Calibri" pitchFamily="34" charset="-120"/>
               </a:rPr>
-              <a:t>Slider t₃ mengubah rekomendasi kami menjadi sesuatu yang bisa dicoba juri: berapa orang tambahan tertangkap per penurunan ambang.</a:t>
+              <a:t>Garis t₃ diseret langsung di histogram: batangnya berubah warna seketika, dan jumlah orang yang tertangkap terhitung ulang di depan mata juri.</a:t>
             </a:r>
             <a:endParaRPr lang="en-US" sz="1050" dirty="0"/>
           </a:p>
@@ -19469,7 +19469,7 @@
                 <a:ea typeface="Calibri" pitchFamily="34" charset="-122"/>
                 <a:cs typeface="Calibri" pitchFamily="34" charset="-120"/>
               </a:rPr>
-              <a:t>Dua puluh responden dengan E[y] tertinggi — bentuk keluaran yang benar-benar dipakai perencana program.</a:t>
+              <a:t>Tabel prioritas yang dapat diurutkan dan diekspor sebagai CSV — bentuk keluaran yang benar-benar dipakai perencana program.</a:t>
             </a:r>
             <a:endParaRPr lang="en-US" sz="1050" dirty="0"/>
           </a:p>

--- a/docs/Pitch_DataQuest5_Warkab.pptx
+++ b/docs/Pitch_DataQuest5_Warkab.pptx
@@ -193,22 +193,22 @@
                 <c:ptCount val="6"/>
                 <c:lvl>
                   <c:pt idx="0">
-                    <c:v>mlp — jaringan saraf</c:v>
+                    <c:v>mlp, jaringan saraf</c:v>
                   </c:pt>
                   <c:pt idx="1">
-                    <c:v>lgb — boosting leaf-wise</c:v>
+                    <c:v>lgb, boosting leaf-wise</c:v>
                   </c:pt>
                   <c:pt idx="2">
-                    <c:v>reg — Huber pada skala ordinal</c:v>
+                    <c:v>reg, Huber pada skala ordinal</c:v>
                   </c:pt>
                   <c:pt idx="3">
-                    <c:v>cat — ordered boosting</c:v>
+                    <c:v>cat, ordered boosting</c:v>
                   </c:pt>
                   <c:pt idx="4">
-                    <c:v>xgb — boosting level-wise</c:v>
+                    <c:v>xgb, boosting level-wise</c:v>
                   </c:pt>
                   <c:pt idx="5">
-                    <c:v>ord — dekomposisi kumulatif P(y&gt;k)</c:v>
+                    <c:v>ord, dekomposisi kumulatif P(y&gt;k)</c:v>
                   </c:pt>
                 </c:lvl>
               </c:multiLvlStrCache>
@@ -1193,7 +1193,7 @@
           <a:p>
             <a:r>
               <a:rPr lang="en-US" dirty="0"/>
-              <a:t>Pembuka. Satu kalimat kunci: kompetisi ini dinilai dengan QWK, dan QWK bukan akurasi — ia mengukur seberapa dekat tebakan kita pada skala ordinal. Seluruh keputusan kami turun dari fakta itu. Perhatikan distribusi di kanan: kelas 3 dan 4 hanya 4,7% dari data, tetapi merekalah yang menentukan skor.</a:t>
+              <a:t>Pembuka. Satu kalimat kunci: kompetisi ini dinilai dengan QWK, dan QWK bukan akurasi, ia mengukur seberapa dekat tebakan kita pada skala ordinal. Seluruh keputusan kami turun dari fakta itu. Perhatikan distribusi di kanan: kelas 3 dan 4 hanya 4,7% dari data, tetapi merekalah yang menentukan skor.</a:t>
             </a:r>
             <a:endParaRPr lang="en-US" dirty="0"/>
           </a:p>
@@ -1633,7 +1633,7 @@
           <a:p>
             <a:r>
               <a:rPr lang="en-US" dirty="0"/>
-              <a:t>Slide ini bisa dilewati kalau waktu pitching sempit — tetapi kalau juri bertanya “apa lagi yang sudah kalian coba”, buka slide ini dan biarkan tabelnya berbicara. Baris merah adalah yang paling penting: satu-satunya konfigurasi yang skornya naik, dan kami tetap menolaknya karena kenaikannya terbukti semu.</a:t>
+              <a:t>Slide ini bisa dilewati kalau waktu pitching sempit, tetapi kalau juri bertanya “apa lagi yang sudah kalian coba”, buka slide ini dan biarkan tabelnya berbicara. Baris merah adalah yang paling penting: satu-satunya konfigurasi yang skornya naik, dan kami tetap menolaknya karena kenaikannya terbukti semu.</a:t>
             </a:r>
             <a:endParaRPr lang="en-US" dirty="0"/>
           </a:p>
@@ -1809,7 +1809,7 @@
           <a:p>
             <a:r>
               <a:rPr lang="en-US" dirty="0"/>
-              <a:t>Ini bukti ketiga dan yang paling kuantitatif. Kecocokan logaritmik dengan R² 0,914 pada rentang data hampir sepuluh kali lipat bukan kebetulan — itu tanda khas kurva belajar yang sudah memasuki wilayah pengembalian yang menurun. Slide berikutnya menerjemahkan koefisien ini menjadi angka yang bisa diperiksa siapa pun.</a:t>
+              <a:t>Ini bukti ketiga dan yang paling kuantitatif. Kecocokan logaritmik dengan R² 0,914 pada rentang data hampir sepuluh kali lipat bukan kebetulan, itu tanda khas kurva belajar yang sudah memasuki wilayah pengembalian yang menurun. Slide berikutnya menerjemahkan koefisien ini menjadi angka yang bisa diperiksa siapa pun.</a:t>
             </a:r>
             <a:endParaRPr lang="en-US" dirty="0"/>
           </a:p>
@@ -1985,7 +1985,7 @@
           <a:p>
             <a:r>
               <a:rPr lang="en-US" dirty="0"/>
-              <a:t>Perhitungan ini sepenuhnya dapat direproduksi dari matriks konfusi yang tercetak di notebook kami — tidak butuh data apa pun yang tidak kami miliki. Implikasinya: enam peringkat berturut-turut di papan skor secara statistik tidak dapat dibedakan. Karena itu kami mengoptimalkan estimator yang stabil, bukan posisi papan skor. Kalau kami mengejar posisi, kami akan mengejar derau.</a:t>
+              <a:t>Perhitungan ini sepenuhnya dapat direproduksi dari matriks konfusi yang tercetak di notebook kami, tidak butuh data apa pun yang tidak kami miliki. Implikasinya: enam peringkat berturut-turut di papan skor secara statistik tidak dapat dibedakan. Karena itu kami mengoptimalkan estimator yang stabil, bukan posisi papan skor. Kalau kami mengejar posisi, kami akan mengejar derau.</a:t>
             </a:r>
             <a:endParaRPr lang="en-US" dirty="0"/>
           </a:p>
@@ -2073,7 +2073,7 @@
           <a:p>
             <a:r>
               <a:rPr lang="en-US" dirty="0"/>
-              <a:t>Poin permutation importance layak ditekankan saat pitching: variabel desain survei muncul tinggi, dan godaannya adalah memakai survey_weight sebagai bobot pelatihan. Kami mengujinya — skornya turun — jadi kami biarkan sebagai fitur biasa. Itu contoh kecil dari pola yang berulang sepanjang proyek: uji dulu, baru putuskan.</a:t>
+              <a:t>Poin permutation importance layak ditekankan saat pitching: variabel desain survei muncul tinggi, dan godaannya adalah memakai survey_weight sebagai bobot pelatihan. Kami mengujinya, skornya turun, jadi kami biarkan sebagai fitur biasa. Itu contoh kecil dari pola yang berulang sepanjang proyek: uji dulu, baru putuskan.</a:t>
             </a:r>
             <a:endParaRPr lang="en-US" dirty="0"/>
           </a:p>
@@ -2161,7 +2161,7 @@
           <a:p>
             <a:r>
               <a:rPr lang="en-US" dirty="0"/>
-              <a:t>Bingkai masalahnya dulu sebelum masuk teknis. Pengguna yang kami bayangkan adalah perencana program kesehatan masyarakat: mereka sudah punya datanya, yang belum ada adalah cara memakainya untuk menandai orang. Tiga angka di tengah menjelaskan mengapa ini bukan tugas klasifikasi biasa — dan ketiganya langsung mengarah ke keputusan desain di slide-slide berikutnya.</a:t>
+              <a:t>Bingkai masalahnya dulu sebelum masuk teknis. Pengguna yang kami bayangkan adalah perencana program kesehatan masyarakat: mereka sudah punya datanya, yang belum ada adalah cara memakainya untuk menandai orang. Tiga angka di tengah menjelaskan mengapa ini bukan tugas klasifikasi biasa, dan ketiganya langsung mengarah ke keputusan desain di slide-slide berikutnya.</a:t>
             </a:r>
             <a:endParaRPr lang="en-US" dirty="0"/>
           </a:p>
@@ -2249,7 +2249,7 @@
           <a:p>
             <a:r>
               <a:rPr lang="en-US" dirty="0"/>
-              <a:t>Buka tautannya saat pitching dan geser slider t3 di depan juri — itu momen paling kuat dari seluruh presentasi, karena rekomendasi kami berubah dari kalimat menjadi sesuatu yang mereka lihat bergerak. Sebutkan juga bahwa model di halaman ini adalah versi ringkas 17 variabel; selisih kinerjanya terhadap pipeline penuh kami cantumkan terbuka di panel Model card.</a:t>
+              <a:t>Buka tautannya saat pitching dan geser slider t3 di depan juri, itu momen paling kuat dari seluruh presentasi, karena rekomendasi kami berubah dari kalimat menjadi sesuatu yang mereka lihat bergerak. Sebutkan juga bahwa model di halaman ini adalah versi ringkas 17 variabel; selisih kinerjanya terhadap pipeline penuh kami cantumkan terbuka di panel Model card.</a:t>
             </a:r>
             <a:endParaRPr lang="en-US" dirty="0"/>
           </a:p>
@@ -2513,7 +2513,7 @@
           <a:p>
             <a:r>
               <a:rPr lang="en-US" dirty="0"/>
-              <a:t>Tutup dengan kalimat besar di kiri, lalu tunjuk tiga angka di kanan. Kalau ada waktu tanya jawab, siapkan tiga jawaban: (1) mengapa tidak pakai deep learning — lihat konvergensi enam keluarga model; (2) mengapa skor tidak lebih tinggi — lihat kurva belajar dan ekstrapolasi; (3) apa yang kalian buang — rumah tangga, fitur komposit, ambang per segmen, dan dua belas lainnya, semuanya dengan angka.</a:t>
+              <a:t>Tutup dengan kalimat besar di kiri, lalu tunjuk tiga angka di kanan. Kalau ada waktu tanya jawab, siapkan tiga jawaban: (1) mengapa tidak pakai deep learning, lihat konvergensi enam keluarga model; (2) mengapa skor tidak lebih tinggi, lihat kurva belajar dan ekstrapolasi; (3) apa yang kalian buang, rumah tangga, fitur komposit, ambang per segmen, dan dua belas lainnya, semuanya dengan angka.</a:t>
             </a:r>
             <a:endParaRPr lang="en-US" dirty="0"/>
           </a:p>
@@ -2777,7 +2777,7 @@
           <a:p>
             <a:r>
               <a:rPr lang="en-US" dirty="0"/>
-              <a:t>Poin yang ingin kami tekankan: setiap temuan EDA di sini diakhiri panah merah — konsekuensi desainnya. Kami tidak menampilkan analisis yang tidak mengubah keputusan apa pun.</a:t>
+              <a:t>Poin yang ingin kami tekankan: setiap temuan EDA di sini diakhiri panah merah, konsekuensi desainnya. Kami tidak menampilkan analisis yang tidak mengubah keputusan apa pun.</a:t>
             </a:r>
             <a:endParaRPr lang="en-US" dirty="0"/>
           </a:p>
@@ -3129,7 +3129,7 @@
           <a:p>
             <a:r>
               <a:rPr lang="en-US" dirty="0"/>
-              <a:t>Meta-learner yang kami pilih bukan logistic regression melainkan rata-rata sederhana lima model pohon — MLP dikeluarkan di muka karena jelas lebih lemah. Alasannya struktural, dijelaskan di slide 13: pada rentang sesempit ini, memilih berdasarkan skor sama dengan memilih derau.</a:t>
+              <a:t>Meta-learner yang kami pilih bukan logistic regression melainkan rata-rata sederhana lima model pohon, MLP dikeluarkan di muka karena jelas lebih lemah. Alasannya struktural, dijelaskan di slide 13: pada rentang sesempit ini, memilih berdasarkan skor sama dengan memilih derau.</a:t>
             </a:r>
             <a:endParaRPr lang="en-US" dirty="0"/>
           </a:p>
@@ -3757,7 +3757,7 @@
                 <a:ea typeface="Calibri" pitchFamily="34" charset="-122"/>
                 <a:cs typeface="Calibri" pitchFamily="34" charset="-120"/>
               </a:rPr>
-              <a:t>1 — Sangat puas</a:t>
+              <a:t>1 · Sangat puas</a:t>
             </a:r>
             <a:endParaRPr lang="en-US" sz="1000" dirty="0"/>
           </a:p>
@@ -3875,7 +3875,7 @@
                 <a:ea typeface="Calibri" pitchFamily="34" charset="-122"/>
                 <a:cs typeface="Calibri" pitchFamily="34" charset="-120"/>
               </a:rPr>
-              <a:t>2 — Puas</a:t>
+              <a:t>2 · Puas</a:t>
             </a:r>
             <a:endParaRPr lang="en-US" sz="1000" dirty="0"/>
           </a:p>
@@ -3993,7 +3993,7 @@
                 <a:ea typeface="Calibri" pitchFamily="34" charset="-122"/>
                 <a:cs typeface="Calibri" pitchFamily="34" charset="-120"/>
               </a:rPr>
-              <a:t>3 — Tidak puas</a:t>
+              <a:t>3 · Tidak puas</a:t>
             </a:r>
             <a:endParaRPr lang="en-US" sz="1000" dirty="0"/>
           </a:p>
@@ -4111,7 +4111,7 @@
                 <a:ea typeface="Calibri" pitchFamily="34" charset="-122"/>
                 <a:cs typeface="Calibri" pitchFamily="34" charset="-120"/>
               </a:rPr>
-              <a:t>4 — Sangat tidak puas</a:t>
+              <a:t>4 · Sangat tidak puas</a:t>
             </a:r>
             <a:endParaRPr lang="en-US" sz="1000" dirty="0"/>
           </a:p>
@@ -4192,7 +4192,7 @@
                 <a:ea typeface="Calibri" pitchFamily="34" charset="-122"/>
                 <a:cs typeface="Calibri" pitchFamily="34" charset="-120"/>
               </a:rPr>
-              <a:t>Dua kelas terbawah hanya 4,7% dari data — dan di sanalah hampir seluruh penalti QWK berada.</a:t>
+              <a:t>Dua kelas terbawah hanya 4,7% dari data, dan di sanalah hampir seluruh penalti QWK berada.</a:t>
             </a:r>
             <a:endParaRPr lang="en-US" sz="1050" dirty="0"/>
           </a:p>
@@ -6709,7 +6709,7 @@
                 <a:ea typeface="Calibri" pitchFamily="34" charset="-122"/>
                 <a:cs typeface="Calibri" pitchFamily="34" charset="-120"/>
               </a:rPr>
-              <a:t>Optimum tunggal menempatkan ambang tepat di satu puncak permukaan QWK — dan puncak itu sebagian dibentuk oleh derau sampling. Merata-ratakan ambang atas puluhan resampel bootstrap menempatkannya di </a:t>
+              <a:t>Optimum tunggal menempatkan ambang tepat di satu puncak permukaan QWK, dan puncak itu sebagian dibentuk oleh derau sampling. Merata-ratakan ambang atas puluhan resampel bootstrap menempatkannya di </a:t>
             </a:r>
             <a:pPr indent="0" marL="0">
               <a:lnSpc>
@@ -6743,7 +6743,7 @@
                 <a:ea typeface="Calibri" pitchFamily="34" charset="-122"/>
                 <a:cs typeface="Calibri" pitchFamily="34" charset="-120"/>
               </a:rPr>
-              <a:t>, bukan di puncak derau. Ini argumen tentang variansi penduga, yang bisa diperiksa tanpa menyentuh data uji sama sekali — karena itu kami menetapkannya sebelum melihat perbandingan skor mana pun.</a:t>
+              <a:t>, bukan di puncak derau. Ini argumen tentang variansi penduga, yang bisa diperiksa tanpa menyentuh data uji sama sekali, karena itu kami menetapkannya sebelum melihat perbandingan skor mana pun.</a:t>
             </a:r>
             <a:endParaRPr lang="en-US" sz="1250" dirty="0"/>
           </a:p>
@@ -7035,7 +7035,7 @@
                 <a:ea typeface="Calibri" pitchFamily="34" charset="-122"/>
                 <a:cs typeface="Calibri" pitchFamily="34" charset="-120"/>
               </a:rPr>
-              <a:t>Sebaran ambang batas atas resampel bootstrap — bukan satu angka, melainkan distribusinya.</a:t>
+              <a:t>Sebaran ambang batas atas resampel bootstrap, bukan satu angka, melainkan distribusinya.</a:t>
             </a:r>
             <a:endParaRPr lang="en-US" sz="1350" dirty="0"/>
           </a:p>
@@ -7074,7 +7074,7 @@
                 <a:ea typeface="Calibri" pitchFamily="34" charset="-122"/>
                 <a:cs typeface="Calibri" pitchFamily="34" charset="-120"/>
               </a:rPr>
-              <a:t>t₁  —  batas kelas 1 | 2</a:t>
+              <a:t>t₁,  batas kelas 1 | 2</a:t>
             </a:r>
             <a:endParaRPr lang="en-US" sz="1200" dirty="0"/>
           </a:p>
@@ -7192,7 +7192,7 @@
                 <a:ea typeface="Calibri" pitchFamily="34" charset="-122"/>
                 <a:cs typeface="Calibri" pitchFamily="34" charset="-120"/>
               </a:rPr>
-              <a:t>t₂  —  batas kelas 2 | 3</a:t>
+              <a:t>t₂,  batas kelas 2 | 3</a:t>
             </a:r>
             <a:endParaRPr lang="en-US" sz="1200" dirty="0"/>
           </a:p>
@@ -7310,7 +7310,7 @@
                 <a:ea typeface="Calibri" pitchFamily="34" charset="-122"/>
                 <a:cs typeface="Calibri" pitchFamily="34" charset="-120"/>
               </a:rPr>
-              <a:t>t₃  —  batas kelas 3 | 4</a:t>
+              <a:t>t₃,  batas kelas 3 | 4</a:t>
             </a:r>
             <a:endParaRPr lang="en-US" sz="1200" dirty="0"/>
           </a:p>
@@ -7590,7 +7590,7 @@
                 <a:ea typeface="Calibri" pitchFamily="34" charset="-122"/>
                 <a:cs typeface="Calibri" pitchFamily="34" charset="-120"/>
               </a:rPr>
-              <a:t>Jumlah baris latih kelas 4 — 0,93% dari data</a:t>
+              <a:t>Jumlah baris latih kelas 4, 0,93% dari data</a:t>
             </a:r>
             <a:endParaRPr lang="en-US" sz="1050" dirty="0"/>
           </a:p>
@@ -7676,7 +7676,7 @@
                 <a:ea typeface="Calibri" pitchFamily="34" charset="-122"/>
                 <a:cs typeface="Calibri" pitchFamily="34" charset="-120"/>
               </a:rPr>
-              <a:t>ketidakstabilan t₃ adalah konsekuensi langsung dari langkanya kelas 4, dan tidak ada model yang bisa memperbaikinya. Kami tidak menyembunyikannya di keterbatasan — kami mengukurnya, lalu memilih strategi estimasi yang secara eksplisit mengurangi variansi itu. Untuk pemakaian nyata, rekomendasi kami adalah </a:t>
+              <a:t>ketidakstabilan t₃ adalah konsekuensi langsung dari langkanya kelas 4, dan tidak ada model yang bisa memperbaikinya. Kami tidak menyembunyikannya di keterbatasan, kami mengukurnya, lalu memilih strategi estimasi yang secara eksplisit mengurangi variansi itu. Untuk pemakaian nyata, rekomendasi kami adalah </a:t>
             </a:r>
             <a:pPr indent="0" marL="0">
               <a:lnSpc>
@@ -8257,7 +8257,7 @@
                 <a:ea typeface="Calibri" pitchFamily="34" charset="-122"/>
                 <a:cs typeface="Calibri" pitchFamily="34" charset="-120"/>
               </a:rPr>
-              <a:t>kolom direkonstruksi dengan akurasi di atas 95% — lima di antaranya sempurna</a:t>
+              <a:t>kolom direkonstruksi dengan akurasi di atas 95%, lima di antaranya sempurna</a:t>
             </a:r>
             <a:endParaRPr lang="en-US" sz="1100" dirty="0"/>
           </a:p>
@@ -8468,7 +8468,7 @@
                 <a:ea typeface="Calibri" pitchFamily="34" charset="-122"/>
                 <a:cs typeface="Calibri" pitchFamily="34" charset="-120"/>
               </a:rPr>
-              <a:t>Memulihkan tiga juta sel tidak menaikkan QWK sama sekali — ketiga tingkat pemulihan menghasilkan skor yang praktis identik. Penjelasannya lugas: nilai yang dapat ditebak dengan akurasi 99% dari kolom lain, menurut definisi, tidak membawa informasi baru. </a:t>
+              <a:t>Memulihkan tiga juta sel tidak menaikkan QWK sama sekali, ketiga tingkat pemulihan menghasilkan skor yang praktis identik. Penjelasannya lugas: nilai yang dapat ditebak dengan akurasi 99% dari kolom lain, menurut definisi, tidak membawa informasi baru. </a:t>
             </a:r>
             <a:pPr indent="0" marL="0">
               <a:lnSpc>
@@ -8924,7 +8924,7 @@
                 <a:ea typeface="Calibri" pitchFamily="34" charset="-122"/>
                 <a:cs typeface="Calibri" pitchFamily="34" charset="-120"/>
               </a:rPr>
-              <a:t>Memasang ambang terpisah untuk setiap segmen — tahun survei, status kesehatan, kelompok usia, dan silangannya — konsisten menaikkan QWK pada himpunan tempat ambang itu dipasang. Semakin banyak segmen, semakin tinggi skornya.</a:t>
+              <a:t>Memasang ambang terpisah untuk setiap segmen, tahun survei, status kesehatan, kelompok usia, dan silangannya, konsisten menaikkan QWK pada himpunan tempat ambang itu dipasang. Semakin banyak segmen, semakin tinggi skornya.</a:t>
             </a:r>
             <a:endParaRPr lang="en-US" sz="1150" dirty="0"/>
           </a:p>
@@ -9191,7 +9191,7 @@
                 <a:ea typeface="Calibri" pitchFamily="34" charset="-122"/>
                 <a:cs typeface="Calibri" pitchFamily="34" charset="-120"/>
               </a:rPr>
-              <a:t> sebelum mengirimkannya. Tanpa uji split-half, konfigurasi ini akan terlihat sebagai perbaikan terbesar kedua dalam proyek — dan akan merugikan kami di data uji. Pengalaman inilah yang mendasari seluruh kebijakan seleksi di slide berikutnya.</a:t>
+              <a:t> sebelum mengirimkannya. Tanpa uji split-half, konfigurasi ini akan terlihat sebagai perbaikan terbesar kedua dalam proyek, dan akan merugikan kami di data uji. Pengalaman inilah yang mendasari seluruh kebijakan seleksi di slide berikutnya.</a:t>
             </a:r>
             <a:endParaRPr lang="en-US" sz="1250" dirty="0"/>
           </a:p>
@@ -12428,7 +12428,7 @@
                 <a:ea typeface="Calibri" pitchFamily="34" charset="-122"/>
                 <a:cs typeface="Calibri" pitchFamily="34" charset="-120"/>
               </a:rPr>
-              <a:t>Dua ablasi tambahan — imputasi median dan seleksi fitur berbasis permutation — dijalankan di luar notebook dengan hasil serupa.</a:t>
+              <a:t>Dua ablasi tambahan, imputasi median dan seleksi fitur berbasis permutation, dijalankan di luar notebook dengan hasil serupa.</a:t>
             </a:r>
             <a:endParaRPr lang="en-US" sz="1000" dirty="0"/>
           </a:p>
@@ -12720,7 +12720,7 @@
                 <a:ea typeface="Calibri" pitchFamily="34" charset="-122"/>
                 <a:cs typeface="Calibri" pitchFamily="34" charset="-120"/>
               </a:rPr>
-              <a:t>Kami mengevaluasi 25 konfigurasi — lima cara menggabungkan model dasar × lima strategi estimasi ambang — lalu menguji apakah kriteria seleksi kami sendiri mampu menunjuk pemenangnya.</a:t>
+              <a:t>Kami mengevaluasi 25 konfigurasi, lima cara menggabungkan model dasar × lima strategi estimasi ambang, lalu menguji apakah kriteria seleksi kami sendiri mampu menunjuk pemenangnya.</a:t>
             </a:r>
             <a:endParaRPr lang="en-US" sz="1350" dirty="0"/>
           </a:p>
@@ -13173,7 +13173,7 @@
                 <a:ea typeface="Calibri" pitchFamily="34" charset="-122"/>
                 <a:cs typeface="Calibri" pitchFamily="34" charset="-120"/>
               </a:rPr>
-              <a:t>Rentang QWK di antara kedua puluh konfigurasi itu — lebih kecil daripada derau pengukurannya sendiri</a:t>
+              <a:t>Rentang QWK di antara kedua puluh konfigurasi itu, lebih kecil daripada derau pengukurannya sendiri</a:t>
             </a:r>
             <a:endParaRPr lang="en-US" sz="1050" dirty="0"/>
           </a:p>
@@ -13293,7 +13293,7 @@
                 <a:ea typeface="Calibri" pitchFamily="34" charset="-122"/>
                 <a:cs typeface="Calibri" pitchFamily="34" charset="-120"/>
               </a:rPr>
-              <a:t>Ketiganya adalah argumen tentang sifat penduga, bukan tentang skor — dan karena itu tidak bisa overfit.</a:t>
+              <a:t>Ketiganya adalah argumen tentang sifat penduga, bukan tentang skor, dan karena itu tidak bisa overfit.</a:t>
             </a:r>
             <a:endParaRPr lang="en-US" sz="1250" dirty="0"/>
           </a:p>
@@ -13585,7 +13585,7 @@
                 <a:ea typeface="Calibri" pitchFamily="34" charset="-122"/>
                 <a:cs typeface="Calibri" pitchFamily="34" charset="-120"/>
               </a:rPr>
-              <a:t>Melatih ulang seluruh pipeline pada 12%, 25%, 45%, 70%, dan 100% data latih — lima titik, masing-masing dengan validasi silang sendiri.</a:t>
+              <a:t>Melatih ulang seluruh pipeline pada 12%, 25%, 45%, 70%, dan 100% data latih, lima titik, masing-masing dengan validasi silang sendiri.</a:t>
             </a:r>
             <a:endParaRPr lang="en-US" sz="1350" dirty="0"/>
           </a:p>
@@ -13910,7 +13910,7 @@
                 <a:ea typeface="Calibri" pitchFamily="34" charset="-122"/>
                 <a:cs typeface="Calibri" pitchFamily="34" charset="-120"/>
               </a:rPr>
-              <a:t>Dan kurva ini masih melambat — sehingga angka di atas justru terlalu optimistis.</a:t>
+              <a:t>Dan kurva ini masih melambat, sehingga angka di atas justru terlalu optimistis.</a:t>
             </a:r>
             <a:endParaRPr lang="en-US" sz="1150" dirty="0"/>
           </a:p>
@@ -15247,7 +15247,7 @@
                 <a:ea typeface="Calibri" pitchFamily="34" charset="-122"/>
                 <a:cs typeface="Calibri" pitchFamily="34" charset="-120"/>
               </a:rPr>
-              <a:t>Kolom terakhir memakai laju wajar survei kesehatan nasional, sekitar 10⁵ responden dewasa per tahun — sebanding dengan laju yang menghasilkan dataset ini.</a:t>
+              <a:t>Kolom terakhir memakai laju wajar survei kesehatan nasional, sekitar 10⁵ responden dewasa per tahun, sebanding dengan laju yang menghasilkan dataset ini.</a:t>
             </a:r>
             <a:endParaRPr lang="en-US" sz="1050" dirty="0"/>
           </a:p>
@@ -15659,7 +15659,7 @@
                 <a:ea typeface="Calibri" pitchFamily="34" charset="-122"/>
                 <a:cs typeface="Calibri" pitchFamily="34" charset="-120"/>
               </a:rPr>
-              <a:t>Bootstrap 400× atas matriks konfusi out-of-fold kami sendiri (95.609 baris) — mengukur berapa banyak QWK bergerak hanya karena baris mana yang kebetulan masuk irisan penilaian.</a:t>
+              <a:t>Bootstrap 400× atas matriks konfusi out-of-fold kami sendiri (95.609 baris), mengukur berapa banyak QWK bergerak hanya karena baris mana yang kebetulan masuk irisan penilaian.</a:t>
             </a:r>
             <a:endParaRPr lang="en-US" sz="1350" dirty="0"/>
           </a:p>
@@ -15698,7 +15698,7 @@
                 <a:ea typeface="Calibri" pitchFamily="34" charset="-122"/>
                 <a:cs typeface="Calibri" pitchFamily="34" charset="-120"/>
               </a:rPr>
-              <a:t>IRISAN 7.100 BARIS  (≈ UKURAN PAPAN SKOR PUBLIK)  —  INTERVAL 95%</a:t>
+              <a:t>IRISAN 7.100 BARIS  (≈ UKURAN PAPAN SKOR PUBLIK),  INTERVAL 95%</a:t>
             </a:r>
             <a:endParaRPr lang="en-US" sz="1000" dirty="0"/>
           </a:p>
@@ -17115,7 +17115,7 @@
                 <a:ea typeface="Calibri" pitchFamily="34" charset="-122"/>
                 <a:cs typeface="Calibri" pitchFamily="34" charset="-120"/>
               </a:rPr>
-              <a:t>Satu sel — aktual 2 diprediksi 1 — menyumbang 35,8% dari seluruh penalti QWK. Di situlah ambiguitas “Sangat puas” versus “Puas” yang sebagian memang subjektif.</a:t>
+              <a:t>Satu sel, aktual 2 diprediksi 1, menyumbang 35,8% dari seluruh penalti QWK. Di situlah ambiguitas “Sangat puas” versus “Puas” yang sebagian memang subjektif.</a:t>
             </a:r>
             <a:endParaRPr lang="en-US" sz="1100" dirty="0"/>
           </a:p>
@@ -17317,7 +17317,7 @@
                 <a:ea typeface="Calibri" pitchFamily="34" charset="-122"/>
                 <a:cs typeface="Calibri" pitchFamily="34" charset="-120"/>
               </a:rPr>
-              <a:t>Split-gain melebih-lebihkan fitur berkardinalitas tinggi. Permutation menempatkan survey_weight, pseudo_stratum, dan pseudo_psu di delapan besar — variabel desain survei, bukan variabel substantif. Kami mengujinya sebagai bobot latih: QWK turun ke 0,4726, jadi keduanya tetap sekadar fitur.</a:t>
+              <a:t>Split-gain melebih-lebihkan fitur berkardinalitas tinggi. Permutation menempatkan survey_weight, pseudo_stratum, dan pseudo_psu di delapan besar, variabel desain survei, bukan variabel substantif. Kami mengujinya sebagai bobot latih: QWK turun ke 0,4726, jadi keduanya tetap sekadar fitur.</a:t>
             </a:r>
             <a:endParaRPr lang="en-US" sz="1100" dirty="0"/>
           </a:p>
@@ -17585,7 +17585,7 @@
                 <a:ea typeface="Calibri" pitchFamily="34" charset="-122"/>
                 <a:cs typeface="Calibri" pitchFamily="34" charset="-120"/>
               </a:rPr>
-              <a:t>model_warkab.joblib memuat keenam model dasar, meta-learner, ketiga ambang batas, dan daftar 176 fitur dalam urutan yang benar — cukup untuk memproduksi ulang submission tanpa melatih apa pun.</a:t>
+              <a:t>model_warkab.joblib memuat keenam model dasar, meta-learner, ketiga ambang batas, dan daftar 176 fitur dalam urutan yang benar, cukup untuk memproduksi ulang submission tanpa melatih apa pun.</a:t>
             </a:r>
             <a:endParaRPr lang="en-US" sz="1100" dirty="0"/>
           </a:p>
@@ -18634,7 +18634,7 @@
                 <a:ea typeface="Calibri" pitchFamily="34" charset="-122"/>
                 <a:cs typeface="Calibri" pitchFamily="34" charset="-120"/>
               </a:rPr>
-              <a:t>QWK di kompetisi, dan di lapangan — daftar prioritas yang terurut, bukan empat label. Kedua-duanya menuntut keluaran pada skala, bukan kelas.</a:t>
+              <a:t>QWK di kompetisi, dan di lapangan, daftar prioritas yang terurut, bukan empat label. Kedua-duanya menuntut keluaran pada skala, bukan kelas.</a:t>
             </a:r>
             <a:endParaRPr lang="en-US" sz="1250" dirty="0"/>
           </a:p>
@@ -18926,7 +18926,7 @@
                 <a:ea typeface="Calibri" pitchFamily="34" charset="-122"/>
                 <a:cs typeface="Calibri" pitchFamily="34" charset="-120"/>
               </a:rPr>
-              <a:t>Aturan keputusan yang sama, dibungkus menjadi alat penapisan yang berjalan sepenuhnya di peramban — tanpa server, tanpa data yang dikirim ke mana pun.</a:t>
+              <a:t>Aturan keputusan yang sama, dibungkus menjadi alat penapisan yang berjalan sepenuhnya di peramban, tanpa server, tanpa data yang dikirim ke mana pun.</a:t>
             </a:r>
             <a:endParaRPr lang="en-US" sz="1350" dirty="0"/>
           </a:p>
@@ -19009,7 +19009,7 @@
                 <a:ea typeface="Calibri" pitchFamily="34" charset="-122"/>
                 <a:cs typeface="Calibri" pitchFamily="34" charset="-120"/>
               </a:rPr>
-              <a:t>Panel skrining individu — E[y] ditampilkan sebagai posisi pada skala, lengkap dengan ketiga ambang batas produksi.</a:t>
+              <a:t>Halaman Ikhtisar: tujuan produk, tiga angka yang mendasarinya, dan empat titik masuk.</a:t>
             </a:r>
             <a:endParaRPr lang="en-US" sz="1000" dirty="0"/>
           </a:p>
@@ -19225,7 +19225,7 @@
                 <a:ea typeface="Calibri" pitchFamily="34" charset="-122"/>
                 <a:cs typeface="Calibri" pitchFamily="34" charset="-120"/>
               </a:rPr>
-              <a:t>Aturan keputusan, bukan label</a:t>
+              <a:t>Tujuannya terbaca dalam sekali lihat</a:t>
             </a:r>
             <a:endParaRPr lang="en-US" sz="1200" dirty="0"/>
           </a:p>
@@ -19267,7 +19267,7 @@
                 <a:ea typeface="Calibri" pitchFamily="34" charset="-122"/>
                 <a:cs typeface="Calibri" pitchFamily="34" charset="-120"/>
               </a:rPr>
-              <a:t>E[y] tampil sebagai posisi pada skala kontinu. Ketika responden jatuh 0,02 dari sebuah ambang, panel mengatakannya.</a:t>
+              <a:t>Grid 200 kotak, tiap kotak satu responden, pada proporsi kelas sebenarnya. Sembilan kotak hangat di ujung adalah 4,7% yang jadi alasan alat ini dibuat.</a:t>
             </a:r>
             <a:endParaRPr lang="en-US" sz="1050" dirty="0"/>
           </a:p>
@@ -19427,7 +19427,7 @@
                 <a:ea typeface="Calibri" pitchFamily="34" charset="-122"/>
                 <a:cs typeface="Calibri" pitchFamily="34" charset="-120"/>
               </a:rPr>
-              <a:t>Keluaran berupa peringkat</a:t>
+              <a:t>Tombol (i) di tiap istilah teknis</a:t>
             </a:r>
             <a:endParaRPr lang="en-US" sz="1200" dirty="0"/>
           </a:p>
@@ -19469,7 +19469,7 @@
                 <a:ea typeface="Calibri" pitchFamily="34" charset="-122"/>
                 <a:cs typeface="Calibri" pitchFamily="34" charset="-120"/>
               </a:rPr>
-              <a:t>Tabel prioritas yang dapat diurutkan dan diekspor sebagai CSV — bentuk keluaran yang benar-benar dipakai perencana program.</a:t>
+              <a:t>Rumus E[y], bobot QWK, dan definisi out-of-fold muncul sebagai popover saat diklik. Siap dipakai menjawab pertanyaan teknis tanpa pindah slide.</a:t>
             </a:r>
             <a:endParaRPr lang="en-US" sz="1050" dirty="0"/>
           </a:p>
@@ -20397,7 +20397,7 @@
                 <a:ea typeface="Calibri" pitchFamily="34" charset="-122"/>
                 <a:cs typeface="Calibri" pitchFamily="34" charset="-120"/>
               </a:rPr>
-              <a:t>Syarat: validasi ulang pada populasi sasaran — model ini dilatih pada satu instrumen, satu negara, 2021–2024.</a:t>
+              <a:t>Syarat: validasi ulang pada populasi sasaran, model ini dilatih pada satu instrumen, satu negara, 2021–2024.</a:t>
             </a:r>
             <a:endParaRPr lang="en-US" sz="1050" dirty="0"/>
           </a:p>
@@ -20939,7 +20939,7 @@
                 <a:ea typeface="Cambria" pitchFamily="34" charset="-122"/>
                 <a:cs typeface="Cambria" pitchFamily="34" charset="-120"/>
               </a:rPr>
-              <a:t>Apa yang layak dilakukan dengan model ini — dan setelahnya</a:t>
+              <a:t>Apa yang layak dilakukan dengan model ini, dan setelahnya</a:t>
             </a:r>
             <a:endParaRPr lang="en-US" sz="3000" dirty="0"/>
           </a:p>
@@ -22071,7 +22071,7 @@
                 <a:ea typeface="Cambria" pitchFamily="34" charset="-122"/>
                 <a:cs typeface="Cambria" pitchFamily="34" charset="-120"/>
               </a:rPr>
-              <a:t>Kami memetakan batasnya —</a:t>
+              <a:t>Kami memetakan batasnya,</a:t>
             </a:r>
             <a:endParaRPr lang="en-US" sz="3600" dirty="0"/>
           </a:p>
@@ -22253,7 +22253,7 @@
                 <a:ea typeface="Calibri" pitchFamily="34" charset="-122"/>
                 <a:cs typeface="Calibri" pitchFamily="34" charset="-120"/>
               </a:rPr>
-              <a:t>dari aturan keputusan ordinal — tuas terbesar dalam kompetisi ini</a:t>
+              <a:t>dari aturan keputusan ordinal, tuas terbesar dalam kompetisi ini</a:t>
             </a:r>
             <a:endParaRPr lang="en-US" sz="1050" dirty="0"/>
           </a:p>
@@ -22555,7 +22555,7 @@
                 <a:ea typeface="Calibri" pitchFamily="34" charset="-122"/>
                 <a:cs typeface="Calibri" pitchFamily="34" charset="-120"/>
               </a:rPr>
-              <a:t>Terima kasih — kami siap menjawab pertanyaan.</a:t>
+              <a:t>Terima kasih, kami siap menjawab pertanyaan.</a:t>
             </a:r>
             <a:endParaRPr lang="en-US" sz="1300" dirty="0"/>
           </a:p>
@@ -23127,7 +23127,7 @@
                 <a:ea typeface="Calibri" pitchFamily="34" charset="-122"/>
                 <a:cs typeface="Calibri" pitchFamily="34" charset="-120"/>
               </a:rPr>
-              <a:t>Mengganti argmax dengan nilai harapan + tiga ambang batas pada model yang sama persis menaikkan QWK sebesar +0,06269. Seluruh sisa pekerjaan — lima model tambahan, stacking, dan studi ambang — hanya menyumbang +0,00708.</a:t>
+              <a:t>Mengganti argmax dengan nilai harapan + tiga ambang batas pada model yang sama persis menaikkan QWK sebesar +0,06269. Seluruh sisa pekerjaan, lima model tambahan, stacking, dan studi ambang, hanya menyumbang +0,00708.</a:t>
             </a:r>
             <a:endParaRPr lang="en-US" sz="1250" dirty="0"/>
           </a:p>
@@ -25425,7 +25425,7 @@
                 <a:ea typeface="Calibri" pitchFamily="34" charset="-122"/>
                 <a:cs typeface="Calibri" pitchFamily="34" charset="-120"/>
               </a:rPr>
-              <a:t>Target diperlakukan sebagai skala ordinal, bukan empat kelas terpisah — karena penaltinya adalah fungsi jarak.</a:t>
+              <a:t>Target diperlakukan sebagai skala ordinal, bukan empat kelas terpisah, karena penaltinya adalah fungsi jarak.</a:t>
             </a:r>
             <a:endParaRPr lang="en-US" sz="1200" dirty="0"/>
           </a:p>
@@ -25449,7 +25449,7 @@
                 <a:ea typeface="Calibri" pitchFamily="34" charset="-122"/>
                 <a:cs typeface="Calibri" pitchFamily="34" charset="-120"/>
               </a:rPr>
-              <a:t>Model harus berani menebak kelas 3 dan 4 meski keduanya hanya 4,7% data — menghindarinya justru merugikan.</a:t>
+              <a:t>Model harus berani menebak kelas 3 dan 4 meski keduanya hanya 4,7% data, menghindarinya justru merugikan.</a:t>
             </a:r>
             <a:endParaRPr lang="en-US" sz="1200" dirty="0"/>
           </a:p>
@@ -26671,7 +26671,7 @@
                 <a:ea typeface="Cambria" pitchFamily="34" charset="-122"/>
                 <a:cs typeface="Cambria" pitchFamily="34" charset="-120"/>
               </a:rPr>
-              <a:t>Jebakan yang kami ukur — lalu tolak</a:t>
+              <a:t>Jebakan yang kami ukur, lalu tolak</a:t>
             </a:r>
             <a:endParaRPr lang="en-US" sz="3100" dirty="0"/>
           </a:p>
@@ -27072,7 +27072,7 @@
                           <a:ea typeface="Calibri" pitchFamily="34" charset="-122"/>
                           <a:cs typeface="Calibri" pitchFamily="34" charset="-120"/>
                         </a:rPr>
-                        <a:t>anggota lain menjawab 1 — Sangat puas</a:t>
+                        <a:t>anggota lain menjawab 1 · Sangat puas</a:t>
                       </a:r>
                       <a:endParaRPr lang="en-US" sz="1150" dirty="0">
                         <a:latin typeface="Calibri" charset="0"/>
@@ -27309,7 +27309,7 @@
                           <a:ea typeface="Calibri" pitchFamily="34" charset="-122"/>
                           <a:cs typeface="Calibri" pitchFamily="34" charset="-120"/>
                         </a:rPr>
-                        <a:t>anggota lain menjawab 2 — Puas</a:t>
+                        <a:t>anggota lain menjawab 2 · Puas</a:t>
                       </a:r>
                       <a:endParaRPr lang="en-US" sz="1150" dirty="0">
                         <a:latin typeface="Calibri" charset="0"/>
@@ -27546,7 +27546,7 @@
                           <a:ea typeface="Calibri" pitchFamily="34" charset="-122"/>
                           <a:cs typeface="Calibri" pitchFamily="34" charset="-120"/>
                         </a:rPr>
-                        <a:t>anggota lain menjawab 3 — Tidak puas</a:t>
+                        <a:t>anggota lain menjawab 3 · Tidak puas</a:t>
                       </a:r>
                       <a:endParaRPr lang="en-US" sz="1150" dirty="0">
                         <a:latin typeface="Calibri" charset="0"/>
@@ -27783,7 +27783,7 @@
                           <a:ea typeface="Calibri" pitchFamily="34" charset="-122"/>
                           <a:cs typeface="Calibri" pitchFamily="34" charset="-120"/>
                         </a:rPr>
-                        <a:t>anggota lain menjawab 4 — Sangat tidak puas</a:t>
+                        <a:t>anggota lain menjawab 4 · Sangat tidak puas</a:t>
                       </a:r>
                       <a:endParaRPr lang="en-US" sz="1150" dirty="0">
                         <a:latin typeface="Calibri" charset="0"/>
@@ -28447,7 +28447,7 @@
                 <a:ea typeface="Calibri" pitchFamily="34" charset="-122"/>
                 <a:cs typeface="Calibri" pitchFamily="34" charset="-120"/>
               </a:rPr>
-              <a:t>fitur ini kami buang — dan kami membuangnya berdasarkan besaran sinyalnya, bukan berdasarkan skor. Kepuasan hidup ternyata jauh lebih individual daripada dugaan awal: mengetahui jawaban orang yang serumah hampir tidak memberi tahu apa pun tentang jawaban responden sendiri.</a:t>
+              <a:t>fitur ini kami buang, dan kami membuangnya berdasarkan besaran sinyalnya, bukan berdasarkan skor. Kepuasan hidup ternyata jauh lebih individual daripada dugaan awal: mengetahui jawaban orang yang serumah hampir tidak memberi tahu apa pun tentang jawaban responden sendiri.</a:t>
             </a:r>
             <a:endParaRPr lang="en-US" sz="1250" dirty="0"/>
           </a:p>
@@ -30198,7 +30198,7 @@
                 <a:ea typeface="Calibri" pitchFamily="34" charset="-122"/>
                 <a:cs typeface="Calibri" pitchFamily="34" charset="-120"/>
               </a:rPr>
-              <a:t>E[y]  —  nilai harapan pada skala kepuasan.  Ketiga ambang diestimasi sepenuhnya dari out-of-fold data latih.</a:t>
+              <a:t>E[y],  nilai harapan pada skala kepuasan.  Ketiga ambang diestimasi sepenuhnya dari out-of-fold data latih.</a:t>
             </a:r>
             <a:endParaRPr lang="en-US" sz="1000" dirty="0"/>
           </a:p>
@@ -30284,7 +30284,7 @@
                 <a:ea typeface="Calibri" pitchFamily="34" charset="-122"/>
                 <a:cs typeface="Calibri" pitchFamily="34" charset="-120"/>
               </a:rPr>
-              <a:t>argmax hanya pernah menebak kelas 3 atau 4 pada 0,70% baris, padahal proporsi sebenarnya 4,71%. Aturan ambang batas menaikkannya ke 8,48% — sengaja melampaui proporsi aktual, karena di bawah penalti kuadratik biaya diam lebih mahal daripada biaya salah satu tingkat.</a:t>
+              <a:t>argmax hanya pernah menebak kelas 3 atau 4 pada 0,70% baris, padahal proporsi sebenarnya 4,71%. Aturan ambang batas menaikkannya ke 8,48%, sengaja melampaui proporsi aktual, karena di bawah penalti kuadratik biaya diam lebih mahal daripada biaya salah satu tingkat.</a:t>
             </a:r>
             <a:endParaRPr lang="en-US" sz="1150" dirty="0"/>
           </a:p>
@@ -30576,7 +30576,7 @@
                 <a:ea typeface="Calibri" pitchFamily="34" charset="-122"/>
                 <a:cs typeface="Calibri" pitchFamily="34" charset="-120"/>
               </a:rPr>
-              <a:t>Bukan dari model. Enam baseline dijalankan penuh — bukan diestimasi — sehingga sumbangan tiap komponen bisa dipisahkan satu per satu.</a:t>
+              <a:t>Bukan dari model. Enam baseline dijalankan penuh, bukan diestimasi, sehingga sumbangan tiap komponen bisa dipisahkan satu per satu.</a:t>
             </a:r>
             <a:endParaRPr lang="en-US" sz="1350" dirty="0"/>
           </a:p>
@@ -31567,7 +31567,7 @@
                 <a:ea typeface="Calibri" pitchFamily="34" charset="-122"/>
                 <a:cs typeface="Calibri" pitchFamily="34" charset="-120"/>
               </a:rPr>
-              <a:t>Lima model dasar tambahan, stacking meta-learner, dan seluruh studi estimasi ambang batas — digabung.</a:t>
+              <a:t>Lima model dasar tambahan, stacking meta-learner, dan seluruh studi estimasi ambang batas, digabung.</a:t>
             </a:r>
             <a:endParaRPr lang="en-US" sz="1050" dirty="0"/>
           </a:p>
@@ -31859,7 +31859,7 @@
                 <a:ea typeface="Calibri" pitchFamily="34" charset="-122"/>
                 <a:cs typeface="Calibri" pitchFamily="34" charset="-120"/>
               </a:rPr>
-              <a:t>Setiap keluarga dipilih karena bias induktifnya berbeda — bukan karena variasi hyperparameter dari model yang sama.</a:t>
+              <a:t>Setiap keluarga dipilih karena bias induktifnya berbeda, bukan karena variasi hyperparameter dari model yang sama.</a:t>
             </a:r>
             <a:endParaRPr lang="en-US" sz="1350" dirty="0"/>
           </a:p>
@@ -32229,7 +32229,7 @@
                 <a:ea typeface="Calibri" pitchFamily="34" charset="-122"/>
                 <a:cs typeface="Calibri" pitchFamily="34" charset="-120"/>
               </a:rPr>
-              <a:t>Ketika enam kelas fungsi yang bias induktifnya sangat berbeda mendarat di titik yang sama, dindingnya berasal dari data — bukan dari model.</a:t>
+              <a:t>Ketika enam kelas fungsi yang bias induktifnya sangat berbeda mendarat di titik yang sama, dindingnya berasal dari data, bukan dari model.</a:t>
             </a:r>
             <a:endParaRPr lang="en-US" sz="1200" dirty="0"/>
           </a:p>
